--- a/docs/PathFinder-essentiel.pptx
+++ b/docs/PathFinder-essentiel.pptx
@@ -17,6 +17,7 @@
     <p:sldId id="265" r:id="rId16"/>
     <p:sldId id="266" r:id="rId17"/>
     <p:sldId id="267" r:id="rId18"/>
+    <p:sldId id="268" r:id="rId19"/>
   </p:sldIdLst>
   <p:sldSz cx="12191695" cy="6858000" type="screen4x3"/>
   <p:notesSz cx="6858000" cy="9144000"/>
@@ -3172,7 +3173,7 @@
                   <a:srgbClr val="6B7280"/>
                 </a:solidFill>
               </a:rPr>
-              <a:t>ASP.NET Core MVC (Razor) · C# 8.0 / .NET 7.0 · aucun JavaScript</a:t>
+              <a:t>ASP.NET Core MVC (Razor) · C# 8.0 / .NET 7.0 · aucun JavaScript · aucune base requise</a:t>
             </a:r>
           </a:p>
         </p:txBody>
@@ -3818,6 +3819,241 @@
                   <a:srgbClr val="16A34A"/>
                 </a:solidFill>
               </a:rPr>
+              <a:t>AUCUNE BASE, AUCUN SCRIPT SQL</a:t>
+            </a:r>
+          </a:p>
+          <a:p>
+            <a:r>
+              <a:rPr sz="2800" b="1">
+                <a:solidFill>
+                  <a:srgbClr val="1F3A5F"/>
+                </a:solidFill>
+              </a:rPr>
+              <a:t>Marche sur tous les postes</a:t>
+            </a:r>
+          </a:p>
+        </p:txBody>
+      </p:sp>
+      <p:sp>
+        <p:nvSpPr>
+          <p:cNvPr id="4" name="TextBox 3"/>
+          <p:cNvSpPr txBox="1"/>
+          <p:nvPr/>
+        </p:nvSpPr>
+        <p:spPr>
+          <a:xfrm>
+            <a:off x="640080" y="1554480"/>
+            <a:ext cx="10911535" cy="4937760"/>
+          </a:xfrm>
+          <a:prstGeom prst="rect">
+            <a:avLst/>
+          </a:prstGeom>
+          <a:noFill/>
+        </p:spPr>
+        <p:txBody>
+          <a:bodyPr wrap="square">
+            <a:spAutoFit/>
+          </a:bodyPr>
+          <a:lstStyle/>
+          <a:p>
+            <a:pPr>
+              <a:spcAft>
+                <a:spcPts val="800"/>
+              </a:spcAft>
+            </a:pPr>
+            <a:r>
+              <a:rPr sz="1400">
+                <a:solidFill>
+                  <a:srgbClr val="222A35"/>
+                </a:solidFill>
+              </a:rPr>
+              <a:t>•  Au démarrage, GraphDataProvider choisit la source (config Data:Source ou env RESTITUTION_DATA_SOURCE) :</a:t>
+            </a:r>
+          </a:p>
+          <a:p>
+            <a:pPr lvl="1">
+              <a:spcAft>
+                <a:spcPts val="800"/>
+              </a:spcAft>
+            </a:pPr>
+            <a:r>
+              <a:rPr sz="1200">
+                <a:solidFill>
+                  <a:srgbClr val="6B7280"/>
+                </a:solidFill>
+              </a:rPr>
+              <a:t>–  auto (défaut) : sonde .\SQLEXPRESS01 / RestitutionGraphe (timeout 3 s). Joignable -&gt; SQL. Sinon -&gt; graphe généré.</a:t>
+            </a:r>
+          </a:p>
+          <a:p>
+            <a:pPr lvl="1">
+              <a:spcAft>
+                <a:spcPts val="800"/>
+              </a:spcAft>
+            </a:pPr>
+            <a:r>
+              <a:rPr sz="1200">
+                <a:solidFill>
+                  <a:srgbClr val="6B7280"/>
+                </a:solidFill>
+              </a:rPr>
+              <a:t>–  sql : force SQL.   generated : force le graphe généré.</a:t>
+            </a:r>
+          </a:p>
+          <a:p>
+            <a:pPr>
+              <a:spcAft>
+                <a:spcPts val="800"/>
+              </a:spcAft>
+            </a:pPr>
+            <a:r>
+              <a:rPr sz="1400">
+                <a:solidFill>
+                  <a:srgbClr val="222A35"/>
+                </a:solidFill>
+              </a:rPr>
+              <a:t>•  Graphe généré (GeneratedGraphData) : 5 000 nœuds (réglable), 2 à 6 arêtes chacun, transformations aléatoires, GRAINE FIXE -&gt; le même graphe partout.</a:t>
+            </a:r>
+          </a:p>
+          <a:p>
+            <a:pPr>
+              <a:spcAft>
+                <a:spcPts val="800"/>
+              </a:spcAft>
+            </a:pPr>
+            <a:r>
+              <a:rPr sz="1400">
+                <a:solidFill>
+                  <a:srgbClr val="222A35"/>
+                </a:solidFill>
+              </a:rPr>
+              <a:t>•  En mode généré : pré-calculs § 11.4 / § 11.5 désactivés (inutiles sur un petit graphe). Tout le reste identique.</a:t>
+            </a:r>
+          </a:p>
+        </p:txBody>
+      </p:sp>
+      <p:sp>
+        <p:nvSpPr>
+          <p:cNvPr id="5" name="TextBox 4"/>
+          <p:cNvSpPr txBox="1"/>
+          <p:nvPr/>
+        </p:nvSpPr>
+        <p:spPr>
+          <a:xfrm>
+            <a:off x="640080" y="6355080"/>
+            <a:ext cx="10911535" cy="411480"/>
+          </a:xfrm>
+          <a:prstGeom prst="rect">
+            <a:avLst/>
+          </a:prstGeom>
+          <a:noFill/>
+        </p:spPr>
+        <p:txBody>
+          <a:bodyPr wrap="none">
+            <a:spAutoFit/>
+          </a:bodyPr>
+          <a:lstStyle/>
+          <a:p>
+            <a:r>
+              <a:rPr sz="1000" i="1">
+                <a:solidFill>
+                  <a:srgbClr val="6B7280"/>
+                </a:solidFill>
+              </a:rPr>
+              <a:t>Le mode généré est une démonstration, pas les vraies données.</a:t>
+            </a:r>
+          </a:p>
+        </p:txBody>
+      </p:sp>
+    </p:spTree>
+  </p:cSld>
+  <p:clrMapOvr>
+    <a:masterClrMapping/>
+  </p:clrMapOvr>
+</p:sld>
+</file>
+
+<file path=ppt/slides/slide13.xml><?xml version="1.0" encoding="utf-8"?>
+<p:sld xmlns:a="http://schemas.openxmlformats.org/drawingml/2006/main" xmlns:p="http://schemas.openxmlformats.org/presentationml/2006/main" xmlns:r="http://schemas.openxmlformats.org/officeDocument/2006/relationships">
+  <p:cSld>
+    <p:spTree>
+      <p:nvGrpSpPr>
+        <p:cNvPr id="1" name=""/>
+        <p:cNvGrpSpPr/>
+        <p:nvPr/>
+      </p:nvGrpSpPr>
+      <p:grpSpPr/>
+      <p:sp>
+        <p:nvSpPr>
+          <p:cNvPr id="2" name="Rectangle 1"/>
+          <p:cNvSpPr/>
+          <p:nvPr/>
+        </p:nvSpPr>
+        <p:spPr>
+          <a:xfrm>
+            <a:off x="0" y="0"/>
+            <a:ext cx="12191695" cy="146304"/>
+          </a:xfrm>
+          <a:prstGeom prst="rect">
+            <a:avLst/>
+          </a:prstGeom>
+          <a:solidFill>
+            <a:srgbClr val="1F3A5F"/>
+          </a:solidFill>
+          <a:ln>
+            <a:noFill/>
+          </a:ln>
+        </p:spPr>
+        <p:style>
+          <a:lnRef idx="1">
+            <a:schemeClr val="accent1"/>
+          </a:lnRef>
+          <a:fillRef idx="3">
+            <a:schemeClr val="accent1"/>
+          </a:fillRef>
+          <a:effectRef idx="2">
+            <a:schemeClr val="accent1"/>
+          </a:effectRef>
+          <a:fontRef idx="minor">
+            <a:schemeClr val="lt1"/>
+          </a:fontRef>
+        </p:style>
+        <p:txBody>
+          <a:bodyPr rtlCol="0" anchor="ctr"/>
+          <a:lstStyle/>
+          <a:p>
+            <a:pPr algn="ctr"/>
+          </a:p>
+        </p:txBody>
+      </p:sp>
+      <p:sp>
+        <p:nvSpPr>
+          <p:cNvPr id="3" name="TextBox 2"/>
+          <p:cNvSpPr txBox="1"/>
+          <p:nvPr/>
+        </p:nvSpPr>
+        <p:spPr>
+          <a:xfrm>
+            <a:off x="548640" y="310896"/>
+            <a:ext cx="11094415" cy="1005840"/>
+          </a:xfrm>
+          <a:prstGeom prst="rect">
+            <a:avLst/>
+          </a:prstGeom>
+          <a:noFill/>
+        </p:spPr>
+        <p:txBody>
+          <a:bodyPr wrap="square">
+            <a:spAutoFit/>
+          </a:bodyPr>
+          <a:lstStyle/>
+          <a:p>
+            <a:r>
+              <a:rPr sz="1200" b="1">
+                <a:solidFill>
+                  <a:srgbClr val="16A34A"/>
+                </a:solidFill>
+              </a:rPr>
               <a:t>LE CŒUR PATHFINDER</a:t>
             </a:r>
           </a:p>
@@ -3932,7 +4168,7 @@
                             <a:srgbClr val="222A35"/>
                           </a:solidFill>
                         </a:rPr>
-                        <a:t>LineVisEdgRepository.cs (StreamAllDirectedEdges) · DirectedGraph.cs (Build → CSR) · InMemoryGraphService.cs (+ GraphPreloader)</a:t>
+                        <a:t>GraphDataProvider.cs (choix SQL / généré) · LineVisEdgRepository.cs (StreamAllDirectedEdges) · GeneratedGraphData.cs · DirectedGraph.cs (Build → CSR) · InMemoryGraphService.cs (EnsureLoaded, GraphPreloader)</a:t>
                       </a:r>
                     </a:p>
                   </a:txBody>
@@ -3976,7 +4212,7 @@
                             <a:srgbClr val="222A35"/>
                           </a:solidFill>
                         </a:rPr>
-                        <a:t>DirectedGraph.cs (BFS bi, Dijkstra, Dijkstra bi, A*/ALT) · InMemoryGraphService.cs (passe-plats) · HomeController.cs (aiguillage + cache) · PathViewModel.cs · LineVisEdgRepository.cs (BFS SQL de repli, DescribePath)</a:t>
+                        <a:t>DirectedGraph.cs (BFS bi, Dijkstra, Dijkstra bi, A*/ALT) · InMemoryGraphService.cs (passe-plats) · HomeController.cs (aiguillage + cache) · PathViewModel.cs · GraphDataProvider.cs (DescribePath)</a:t>
                       </a:r>
                     </a:p>
                   </a:txBody>
@@ -4220,7 +4456,7 @@
                   <a:srgbClr val="222A35"/>
                 </a:solidFill>
               </a:rPr>
-              <a:t>•  Le graphe : la table SQL Server dbo.LINE_VIS_EDG (jeu de démo : 100 008 nœuds, 400 787 arêtes).</a:t>
+              <a:t>•  Le graphe : la table SQL Server dbo.LINE_VIS_EDG (jeu de démo : 100 008 nœuds) — ou, si SQL est absent, un graphe généré en mémoire (5 000 nœuds).</a:t>
             </a:r>
           </a:p>
           <a:p>
@@ -4971,7 +5207,7 @@
               </a:spcAft>
             </a:pPr>
             <a:r>
-              <a:rPr sz="1500">
+              <a:rPr sz="1400">
                 <a:solidFill>
                   <a:srgbClr val="222A35"/>
                 </a:solidFill>
@@ -4986,12 +5222,12 @@
               </a:spcAft>
             </a:pPr>
             <a:r>
-              <a:rPr sz="1500">
+              <a:rPr sz="1400">
                 <a:solidFill>
                   <a:srgbClr val="222A35"/>
                 </a:solidFill>
               </a:rPr>
-              <a:t>•  Chargement sur un Thread d'arrière-plan (pas d'async) : le serveur répond tout de suite ; repli sur le BFS SQL tant que le graphe n'est pas prêt.</a:t>
+              <a:t>•  Chargement sur un Thread d'arrière-plan (pas d'async) : le serveur répond tout de suite ; EnsureLoaded() le construit à la 1re recherche s'il n'est pas prêt.</a:t>
             </a:r>
           </a:p>
           <a:p>
@@ -5001,12 +5237,27 @@
               </a:spcAft>
             </a:pPr>
             <a:r>
-              <a:rPr sz="1500">
+              <a:rPr sz="1400">
                 <a:solidFill>
                   <a:srgbClr val="222A35"/>
                 </a:solidFill>
               </a:rPr>
-              <a:t>•  ~12 Mo pour 100 000 nœuds ; chargement ~1,2–2,0 s.</a:t>
+              <a:t>•  Source : SQL Server si joignable, sinon graphe généré en mémoire (aucune base requise — voir dernière diapo).</a:t>
+            </a:r>
+          </a:p>
+          <a:p>
+            <a:pPr>
+              <a:spcAft>
+                <a:spcPts val="800"/>
+              </a:spcAft>
+            </a:pPr>
+            <a:r>
+              <a:rPr sz="1400">
+                <a:solidFill>
+                  <a:srgbClr val="222A35"/>
+                </a:solidFill>
+              </a:rPr>
+              <a:t>•  ~12 Mo / ~1,2–2,0 s (SQL, 100 000 nœuds) · ~35 ms (généré, 5 000 nœuds).</a:t>
             </a:r>
           </a:p>
         </p:txBody>
@@ -6408,7 +6659,7 @@
                 </a:solidFill>
                 <a:latin typeface="Consolas"/>
               </a:rPr>
-              <a:t>1.  Condensation SCC (§ 11.5, si calculée)</a:t>
+              <a:t>1.  (mode SQL) Condensation SCC (§ 11.5, si calculée)</a:t>
             </a:r>
           </a:p>
           <a:p>
@@ -6441,7 +6692,7 @@
                 </a:solidFill>
                 <a:latin typeface="Consolas"/>
               </a:rPr>
-              <a:t>2.  sinon : Composantes faibles (§ 11.4, si calculées)</a:t>
+              <a:t>2.  (mode SQL) sinon : Composantes faibles (§ 11.4, si calculées)</a:t>
             </a:r>
           </a:p>
           <a:p>
@@ -6474,7 +6725,7 @@
                 </a:solidFill>
                 <a:latin typeface="Consolas"/>
               </a:rPr>
-              <a:t>3.  sinon : Cache applicatif (5 min)  -&gt;  résultat déjà connu ?</a:t>
+              <a:t>3.  Cache applicatif (5 min)  -&gt;  résultat déjà connu ?</a:t>
             </a:r>
           </a:p>
           <a:p>
@@ -6496,7 +6747,7 @@
                 </a:solidFill>
                 <a:latin typeface="Consolas"/>
               </a:rPr>
-              <a:t>4.  sinon : Parcours avec l'algo choisi, sur le graphe en mémoire</a:t>
+              <a:t>4.  sinon : EnsureLoaded()  puis  l'algo choisi</a:t>
             </a:r>
           </a:p>
           <a:p>
@@ -6507,18 +6758,7 @@
                 </a:solidFill>
                 <a:latin typeface="Consolas"/>
               </a:rPr>
-              <a:t> </a:t>
-            </a:r>
-          </a:p>
-          <a:p>
-            <a:r>
-              <a:rPr sz="1400">
-                <a:solidFill>
-                  <a:srgbClr val="222A35"/>
-                </a:solidFill>
-                <a:latin typeface="Consolas"/>
-              </a:rPr>
-              <a:t>5.  graphe pas encore chargé  -&gt;  repli BFS SQL palier par palier</a:t>
+              <a:t>        TOUJOURS sur le graphe en mémoire — plus de repli SQL</a:t>
             </a:r>
           </a:p>
         </p:txBody>
@@ -6551,7 +6791,7 @@
                   <a:srgbClr val="6B7280"/>
                 </a:solidFill>
               </a:rPr>
-              <a:t>Les deux pré-calculs (§ 11.4 / § 11.5) se déclenchent depuis la page /Scan.</a:t>
+              <a:t>En mode graphe généré, les étapes 1-2 sont sautées (petit graphe, recherche déjà instantanée).</a:t>
             </a:r>
           </a:p>
         </p:txBody>
